--- a/slides/15_Publishing_Our_Data_Story.pptx
+++ b/slides/15_Publishing_Our_Data_Story.pptx
@@ -139,7 +139,7 @@
   <p:extLst>
     <p:ext uri="{521415D9-36F7-43E2-AB2F-B90AF26B5E84}">
       <p14:sectionLst xmlns:p14="http://schemas.microsoft.com/office/powerpoint/2010/main">
-        <p14:section name="Introduction" id="{f528cbee-a670-2331-4ac2-8131b49423d7}">
+        <p14:section name="Introduction" id="{28b7a059-4ace-3213-61bc-dbf7b3ce7223}">
           <p14:sldIdLst>
             <p14:sldId id="256"/>
             <p14:sldId id="257"/>
@@ -147,7 +147,7 @@
             <p14:sldId id="259"/>
           </p14:sldIdLst>
         </p14:section>
-        <p14:section name="Writing with mo.md" id="{e5527c31-be01-54f0-0075-99db0b103eb2}">
+        <p14:section name="Writing with mo.md" id="{5b5a7488-cfd2-e0e0-e8f5-5ac44ae3c9ab}">
           <p14:sldIdLst>
             <p14:sldId id="260"/>
             <p14:sldId id="261"/>
@@ -156,7 +156,7 @@
             <p14:sldId id="264"/>
           </p14:sldIdLst>
         </p14:section>
-        <p14:section name="Putting numbers in our text" id="{e812d2cc-a52b-d1d7-bc3d-244c7800f768}">
+        <p14:section name="Putting numbers in our text" id="{c8174bcf-1909-7073-a2c3-be5c79b4154f}">
           <p14:sldIdLst>
             <p14:sldId id="265"/>
             <p14:sldId id="266"/>
@@ -165,7 +165,7 @@
             <p14:sldId id="269"/>
           </p14:sldIdLst>
         </p14:section>
-        <p14:section name="Being honest about limitations" id="{e405dce7-fcd7-0a78-5958-c715a01b0d1b}">
+        <p14:section name="Being honest about limitations" id="{ced4349f-2ac7-b844-3926-b2351c814055}">
           <p14:sldIdLst>
             <p14:sldId id="270"/>
             <p14:sldId id="271"/>
@@ -173,7 +173,7 @@
             <p14:sldId id="273"/>
           </p14:sldIdLst>
         </p14:section>
-        <p14:section name="Tidying for our audience" id="{22fcb9d0-3d41-a46f-17e6-8f1cad671200}">
+        <p14:section name="Tidying for our audience" id="{24cc9573-4e4d-8ca9-ee1c-f08641728570}">
           <p14:sldIdLst>
             <p14:sldId id="274"/>
             <p14:sldId id="275"/>
@@ -181,20 +181,20 @@
             <p14:sldId id="277"/>
           </p14:sldIdLst>
         </p14:section>
-        <p14:section name="Checking the app view" id="{f5464f4f-2660-2810-0f2d-b528442aad30}">
+        <p14:section name="Checking the app view" id="{ce15c9d9-27a4-66b3-2d48-9a4bed1e9a8c}">
           <p14:sldIdLst>
             <p14:sldId id="278"/>
             <p14:sldId id="279"/>
             <p14:sldId id="280"/>
           </p14:sldIdLst>
         </p14:section>
-        <p14:section name="Getting ready for the class server" id="{759f1e4e-9c83-0f52-5f41-a5874415c670}">
+        <p14:section name="Getting ready for the class server" id="{e7b009cb-235d-0124-acd3-0d9a7a7f2c85}">
           <p14:sldIdLst>
             <p14:sldId id="281"/>
             <p14:sldId id="282"/>
           </p14:sldIdLst>
         </p14:section>
-        <p14:section name="Handing in our story" id="{0a1c8a93-649b-9194-dffb-bb55ceb5058b}">
+        <p14:section name="Handing in our story" id="{9070a6cd-bed8-ace7-f8aa-fa511242722a}">
           <p14:sldIdLst>
             <p14:sldId id="283"/>
             <p14:sldId id="284"/>
@@ -202,7 +202,7 @@
             <p14:sldId id="286"/>
           </p14:sldIdLst>
         </p14:section>
-        <p14:section name="Wrap up" id="{7ff95917-2839-9132-9689-2893e8a7b38e}">
+        <p14:section name="Wrap up" id="{110c1bc8-35f3-8af9-8d02-2f54af03399b}">
           <p14:sldIdLst>
             <p14:sldId id="287"/>
             <p14:sldId id="288"/>
@@ -4358,7 +4358,7 @@
               <a:t>Typed numbers go wrong when our data changes. Instead we give each number a clear name, then put it inside </a:t>
             </a:r>
             <a:r>
-              <a:rPr lang="en-US" sz="1600" dirty="0">
+              <a:rPr lang="en-US" sz="1600" b="1" dirty="0">
                 <a:solidFill>
                   <a:srgbClr val="E8A55A"/>
                 </a:solidFill>
@@ -4953,7 +4953,7 @@
               <a:t> We give each number a clear name, then the </a:t>
             </a:r>
             <a:r>
-              <a:rPr lang="en-US" sz="1300" dirty="0">
+              <a:rPr lang="en-US" sz="1300" b="1" dirty="0">
                 <a:solidFill>
                   <a:srgbClr val="B86E1E"/>
                 </a:solidFill>
@@ -4972,7 +4972,7 @@
               <a:t> lets us put those names inside </a:t>
             </a:r>
             <a:r>
-              <a:rPr lang="en-US" sz="1300" dirty="0">
+              <a:rPr lang="en-US" sz="1300" b="1" dirty="0">
                 <a:solidFill>
                   <a:srgbClr val="B86E1E"/>
                 </a:solidFill>
@@ -5213,7 +5213,7 @@
               <a:t>Add a sentence that uses the median prices from the </a:t>
             </a:r>
             <a:r>
-              <a:rPr lang="en-US" sz="1800" dirty="0">
+              <a:rPr lang="en-US" sz="1800" b="1" dirty="0">
                 <a:solidFill>
                   <a:srgbClr val="B86E1E"/>
                 </a:solidFill>
@@ -5449,7 +5449,7 @@
               <a:t>, the same as our </a:t>
             </a:r>
             <a:r>
-              <a:rPr lang="en-US" sz="1600" dirty="0">
+              <a:rPr lang="en-US" sz="1600" b="1" dirty="0">
                 <a:solidFill>
                   <a:srgbClr val="B86E1E"/>
                 </a:solidFill>
@@ -5520,7 +5520,7 @@
               <a:t>each insight gets its own </a:t>
             </a:r>
             <a:r>
-              <a:rPr lang="en-US" sz="1600" dirty="0">
+              <a:rPr lang="en-US" sz="1600" b="1" dirty="0">
                 <a:solidFill>
                   <a:srgbClr val="B86E1E"/>
                 </a:solidFill>
@@ -5785,7 +5785,7 @@
               <a:t>When we made </a:t>
             </a:r>
             <a:r>
-              <a:rPr lang="en-US" sz="1800" dirty="0">
+              <a:rPr lang="en-US" sz="1800" b="1" dirty="0">
                 <a:solidFill>
                   <a:srgbClr val="B86E1E"/>
                 </a:solidFill>
@@ -5804,7 +5804,7 @@
               <a:t>, we sorted it by </a:t>
             </a:r>
             <a:r>
-              <a:rPr lang="en-US" sz="1800" dirty="0">
+              <a:rPr lang="en-US" sz="1800" b="1" dirty="0">
                 <a:solidFill>
                   <a:srgbClr val="B86E1E"/>
                 </a:solidFill>
@@ -5823,7 +5823,7 @@
               <a:t>, so Indie is always the first row, </a:t>
             </a:r>
             <a:r>
-              <a:rPr lang="en-US" sz="1800" dirty="0">
+              <a:rPr lang="en-US" sz="1800" b="1" dirty="0">
                 <a:solidFill>
                   <a:srgbClr val="B86E1E"/>
                 </a:solidFill>
@@ -5842,7 +5842,7 @@
               <a:t>, and Not Indie is always the second, </a:t>
             </a:r>
             <a:r>
-              <a:rPr lang="en-US" sz="1800" dirty="0">
+              <a:rPr lang="en-US" sz="1800" b="1" dirty="0">
                 <a:solidFill>
                   <a:srgbClr val="B86E1E"/>
                 </a:solidFill>
@@ -8092,7 +8092,7 @@
               <a:t>how to write the words of our story with </a:t>
             </a:r>
             <a:r>
-              <a:rPr lang="en-US" sz="1800" dirty="0">
+              <a:rPr lang="en-US" sz="1800" b="1" dirty="0">
                 <a:solidFill>
                   <a:srgbClr val="B86E1E"/>
                 </a:solidFill>
@@ -9376,7 +9376,7 @@
               <a:t>e.g. end the cell that makes </a:t>
             </a:r>
             <a:r>
-              <a:rPr lang="en-US" sz="1600" dirty="0">
+              <a:rPr lang="en-US" sz="1600" b="1" dirty="0">
                 <a:solidFill>
                   <a:srgbClr val="B86E1E"/>
                 </a:solidFill>
@@ -9421,7 +9421,7 @@
               <a:t>delete the </a:t>
             </a:r>
             <a:r>
-              <a:rPr lang="en-US" sz="1600" dirty="0">
+              <a:rPr lang="en-US" sz="1600" b="1" dirty="0">
                 <a:solidFill>
                   <a:srgbClr val="B86E1E"/>
                 </a:solidFill>
@@ -10257,7 +10257,7 @@
               <a:t>, type </a:t>
             </a:r>
             <a:r>
-              <a:rPr lang="en-US" sz="1300" dirty="0">
+              <a:rPr lang="en-US" sz="1300" b="1" dirty="0">
                 <a:solidFill>
                   <a:srgbClr val="B86E1E"/>
                 </a:solidFill>
@@ -10292,7 +10292,7 @@
               <a:t> to stop editing. The </a:t>
             </a:r>
             <a:r>
-              <a:rPr lang="en-US" sz="1300" dirty="0">
+              <a:rPr lang="en-US" sz="1300" b="1" dirty="0">
                 <a:solidFill>
                   <a:srgbClr val="B86E1E"/>
                 </a:solidFill>
@@ -10561,7 +10561,7 @@
               <a:t>, fix it in </a:t>
             </a:r>
             <a:r>
-              <a:rPr lang="en-US" sz="1300" dirty="0">
+              <a:rPr lang="en-US" sz="1300" b="1" dirty="0">
                 <a:solidFill>
                   <a:srgbClr val="B86E1E"/>
                 </a:solidFill>
@@ -10727,7 +10727,7 @@
               <a:t>​</a:t>
             </a:r>
             <a:r>
-              <a:rPr lang="en-US" sz="1600" dirty="0">
+              <a:rPr lang="en-US" sz="1600" b="1" dirty="0">
                 <a:solidFill>
                   <a:srgbClr val="E8A55A"/>
                 </a:solidFill>
@@ -11091,7 +11091,7 @@
               <a:t>Nothing seems to change: </a:t>
             </a:r>
             <a:r>
-              <a:rPr lang="en-US" sz="1300" dirty="0">
+              <a:rPr lang="en-US" sz="1300" b="1" dirty="0">
                 <a:solidFill>
                   <a:srgbClr val="B86E1E"/>
                 </a:solidFill>
@@ -11199,7 +11199,7 @@
               <a:t> </a:t>
             </a:r>
             <a:r>
-              <a:rPr lang="en-US" sz="1300" dirty="0">
+              <a:rPr lang="en-US" sz="1300" b="1" dirty="0">
                 <a:solidFill>
                   <a:srgbClr val="B86E1E"/>
                 </a:solidFill>
@@ -11775,7 +11775,7 @@
               <a:t>Our teacher will tell us how to hand them in. Then we get an address for the class server, such as </a:t>
             </a:r>
             <a:r>
-              <a:rPr lang="en-US" sz="1300" dirty="0">
+              <a:rPr lang="en-US" sz="1300" b="1" dirty="0">
                 <a:solidFill>
                   <a:srgbClr val="B86E1E"/>
                 </a:solidFill>
@@ -12512,7 +12512,7 @@
               <a:t>our story opens with </a:t>
             </a:r>
             <a:r>
-              <a:rPr lang="en-US" sz="1800" dirty="0">
+              <a:rPr lang="en-US" sz="1800" b="1" dirty="0">
                 <a:solidFill>
                   <a:srgbClr val="B86E1E"/>
                 </a:solidFill>
@@ -12799,7 +12799,7 @@
               <a:t>Why does </a:t>
             </a:r>
             <a:r>
-              <a:rPr lang="en-US" sz="1800" dirty="0">
+              <a:rPr lang="en-US" sz="1800" b="1" dirty="0">
                 <a:solidFill>
                   <a:srgbClr val="E8A55A"/>
                 </a:solidFill>
@@ -12872,7 +12872,7 @@
               <a:t>Why does our story need </a:t>
             </a:r>
             <a:r>
-              <a:rPr lang="en-US" sz="1800" dirty="0">
+              <a:rPr lang="en-US" sz="1800" b="1" dirty="0">
                 <a:solidFill>
                   <a:srgbClr val="E8A55A"/>
                 </a:solidFill>
@@ -13154,7 +13154,7 @@
               <a:t>Write the </a:t>
             </a:r>
             <a:r>
-              <a:rPr lang="en-US" sz="1400" dirty="0">
+              <a:rPr lang="en-US" sz="1400" b="1" dirty="0">
                 <a:solidFill>
                   <a:srgbClr val="B86E1E"/>
                 </a:solidFill>
@@ -13200,7 +13200,7 @@
               <a:t>Check your story with </a:t>
             </a:r>
             <a:r>
-              <a:rPr lang="en-US" sz="1400" dirty="0">
+              <a:rPr lang="en-US" sz="1400" b="1" dirty="0">
                 <a:solidFill>
                   <a:srgbClr val="B86E1E"/>
                 </a:solidFill>
@@ -13246,7 +13246,7 @@
               <a:t>Change the cell that loads your data to use </a:t>
             </a:r>
             <a:r>
-              <a:rPr lang="en-US" sz="1400" dirty="0">
+              <a:rPr lang="en-US" sz="1400" b="1" dirty="0">
                 <a:solidFill>
                   <a:srgbClr val="B86E1E"/>
                 </a:solidFill>
@@ -13638,7 +13638,7 @@
               <a:t> into formatted text in our notebook, using </a:t>
             </a:r>
             <a:r>
-              <a:rPr lang="en-US" sz="1600" dirty="0">
+              <a:rPr lang="en-US" sz="1600" b="1" dirty="0">
                 <a:solidFill>
                   <a:srgbClr val="E8A55A"/>
                 </a:solidFill>
@@ -14589,7 +14589,7 @@
               <a:t> </a:t>
             </a:r>
             <a:r>
-              <a:rPr lang="en-US" sz="1300" dirty="0">
+              <a:rPr lang="en-US" sz="1300" b="1" dirty="0">
                 <a:solidFill>
                   <a:srgbClr val="B86E1E"/>
                 </a:solidFill>
